--- a/DOKUMENTUMOK/SzakmaiVizsga_Prezentacio.pptx
+++ b/DOKUMENTUMOK/SzakmaiVizsga_Prezentacio.pptx
@@ -277,7 +277,7 @@
             <a:fld id="{A4875C68-41B4-4262-A6AB-3309F1D83C9B}" type="datetime1">
               <a:rPr lang="hu-HU"/>
               <a:pPr lvl="0"/>
-              <a:t>2026. 04. 10.</a:t>
+              <a:t>2026. 04. 13.</a:t>
             </a:fld>
             <a:endParaRPr lang="hu-HU"/>
           </a:p>
@@ -3068,7 +3068,7 @@
             <a:fld id="{7636A302-0D39-43B4-B12B-CDD5BAEF6732}" type="datetime1">
               <a:rPr lang="hu-HU"/>
               <a:pPr lvl="0"/>
-              <a:t>2026. 04. 10.</a:t>
+              <a:t>2026. 04. 13.</a:t>
             </a:fld>
             <a:endParaRPr lang="hu-HU"/>
           </a:p>
@@ -3304,7 +3304,7 @@
             <a:fld id="{3B0C5518-E666-40F1-9AF0-D353F8D844CC}" type="datetime1">
               <a:rPr lang="hu-HU"/>
               <a:pPr lvl="0"/>
-              <a:t>2026. 04. 10.</a:t>
+              <a:t>2026. 04. 13.</a:t>
             </a:fld>
             <a:endParaRPr lang="hu-HU"/>
           </a:p>
@@ -3550,7 +3550,7 @@
             <a:fld id="{6EB9FB72-B17C-4EE6-899C-36BDD2FAFA48}" type="datetime1">
               <a:rPr lang="hu-HU"/>
               <a:pPr lvl="0"/>
-              <a:t>2026. 04. 10.</a:t>
+              <a:t>2026. 04. 13.</a:t>
             </a:fld>
             <a:endParaRPr lang="hu-HU"/>
           </a:p>
@@ -3825,7 +3825,7 @@
             <a:fld id="{67FBAACA-08A4-4EBE-9E0C-58B65AE4A5A7}" type="datetime1">
               <a:rPr lang="hu-HU"/>
               <a:pPr lvl="0"/>
-              <a:t>2026. 04. 10.</a:t>
+              <a:t>2026. 04. 13.</a:t>
             </a:fld>
             <a:endParaRPr lang="hu-HU"/>
           </a:p>
@@ -4035,7 +4035,7 @@
             <a:fld id="{4A835D54-A19F-42F4-947F-ABC3E6BC268E}" type="datetime1">
               <a:rPr lang="hu-HU"/>
               <a:pPr lvl="0"/>
-              <a:t>2026. 04. 10.</a:t>
+              <a:t>2026. 04. 13.</a:t>
             </a:fld>
             <a:endParaRPr lang="hu-HU"/>
           </a:p>
@@ -4355,7 +4355,7 @@
             <a:fld id="{11375920-0594-4B7A-9F54-4CA5B22C6B54}" type="datetime1">
               <a:rPr lang="hu-HU"/>
               <a:pPr lvl="0"/>
-              <a:t>2026. 04. 10.</a:t>
+              <a:t>2026. 04. 13.</a:t>
             </a:fld>
             <a:endParaRPr lang="hu-HU"/>
           </a:p>
@@ -4758,7 +4758,7 @@
             <a:fld id="{7E53AA98-F41F-462E-8F83-5380F28C0AEC}" type="datetime1">
               <a:rPr lang="hu-HU"/>
               <a:pPr lvl="0"/>
-              <a:t>2026. 04. 10.</a:t>
+              <a:t>2026. 04. 13.</a:t>
             </a:fld>
             <a:endParaRPr lang="hu-HU"/>
           </a:p>
@@ -4920,7 +4920,7 @@
             <a:fld id="{B1BF45F6-A8D9-43F4-9CDF-9E349FB991E6}" type="datetime1">
               <a:rPr lang="hu-HU"/>
               <a:pPr lvl="0"/>
-              <a:t>2026. 04. 10.</a:t>
+              <a:t>2026. 04. 13.</a:t>
             </a:fld>
             <a:endParaRPr lang="hu-HU"/>
           </a:p>
@@ -5048,7 +5048,7 @@
             <a:fld id="{DA8389BB-691F-4C0B-AE2B-929C3C08EACD}" type="datetime1">
               <a:rPr lang="hu-HU"/>
               <a:pPr lvl="0"/>
-              <a:t>2026. 04. 10.</a:t>
+              <a:t>2026. 04. 13.</a:t>
             </a:fld>
             <a:endParaRPr lang="hu-HU"/>
           </a:p>
@@ -5333,7 +5333,7 @@
             <a:fld id="{2BF7091A-BA1D-4307-B1AD-530736BB8FB7}" type="datetime1">
               <a:rPr lang="hu-HU"/>
               <a:pPr lvl="0"/>
-              <a:t>2026. 04. 10.</a:t>
+              <a:t>2026. 04. 13.</a:t>
             </a:fld>
             <a:endParaRPr lang="hu-HU"/>
           </a:p>
@@ -5575,7 +5575,7 @@
             <a:fld id="{C3FB93FE-C09A-48F6-A94B-D2D05F1D57E7}" type="datetime1">
               <a:rPr lang="hu-HU"/>
               <a:pPr lvl="0"/>
-              <a:t>2026. 04. 10.</a:t>
+              <a:t>2026. 04. 13.</a:t>
             </a:fld>
             <a:endParaRPr lang="hu-HU"/>
           </a:p>
@@ -5858,7 +5858,7 @@
             <a:fld id="{63794B5B-B97E-4CAC-8EC2-FA54EA6FC3B4}" type="datetime1">
               <a:rPr lang="hu-HU"/>
               <a:pPr lvl="0"/>
-              <a:t>2026. 04. 10.</a:t>
+              <a:t>2026. 04. 13.</a:t>
             </a:fld>
             <a:endParaRPr lang="hu-HU"/>
           </a:p>
@@ -17257,7 +17257,7 @@
         </p:nvSpPr>
         <p:spPr>
           <a:xfrm>
-            <a:off x="5931414" y="2542052"/>
+            <a:off x="5931414" y="2411251"/>
             <a:ext cx="6138671" cy="981442"/>
           </a:xfrm>
           <a:prstGeom prst="rect">
@@ -17323,7 +17323,7 @@
         </p:nvSpPr>
         <p:spPr>
           <a:xfrm>
-            <a:off x="6053342" y="2607492"/>
+            <a:off x="6053342" y="2476691"/>
             <a:ext cx="5880208" cy="360993"/>
           </a:xfrm>
           <a:prstGeom prst="rect">
@@ -17396,7 +17396,7 @@
         </p:nvSpPr>
         <p:spPr>
           <a:xfrm>
-            <a:off x="6053342" y="3083541"/>
+            <a:off x="6053342" y="2952740"/>
             <a:ext cx="5880208" cy="406114"/>
           </a:xfrm>
           <a:prstGeom prst="rect">
@@ -17469,7 +17469,7 @@
         </p:nvSpPr>
         <p:spPr>
           <a:xfrm>
-            <a:off x="5931414" y="3724683"/>
+            <a:off x="5931414" y="3476374"/>
             <a:ext cx="6138671" cy="981442"/>
           </a:xfrm>
           <a:prstGeom prst="rect">
@@ -17535,7 +17535,7 @@
         </p:nvSpPr>
         <p:spPr>
           <a:xfrm>
-            <a:off x="6053342" y="3790123"/>
+            <a:off x="6053342" y="3541814"/>
             <a:ext cx="5880208" cy="360993"/>
           </a:xfrm>
           <a:prstGeom prst="rect">
@@ -17608,7 +17608,7 @@
         </p:nvSpPr>
         <p:spPr>
           <a:xfrm>
-            <a:off x="6053342" y="4266172"/>
+            <a:off x="6053342" y="4017863"/>
             <a:ext cx="5880208" cy="406114"/>
           </a:xfrm>
           <a:prstGeom prst="rect">
@@ -17681,7 +17681,7 @@
         </p:nvSpPr>
         <p:spPr>
           <a:xfrm>
-            <a:off x="5931414" y="4907304"/>
+            <a:off x="5931414" y="4541274"/>
             <a:ext cx="6138671" cy="981442"/>
           </a:xfrm>
           <a:prstGeom prst="rect">
@@ -17747,7 +17747,7 @@
         </p:nvSpPr>
         <p:spPr>
           <a:xfrm>
-            <a:off x="6053342" y="4972744"/>
+            <a:off x="6053342" y="4606714"/>
             <a:ext cx="5880208" cy="360993"/>
           </a:xfrm>
           <a:prstGeom prst="rect">
@@ -17820,7 +17820,7 @@
         </p:nvSpPr>
         <p:spPr>
           <a:xfrm>
-            <a:off x="6053342" y="5448793"/>
+            <a:off x="6053342" y="5082763"/>
             <a:ext cx="5880208" cy="406114"/>
           </a:xfrm>
           <a:prstGeom prst="rect">
@@ -17893,7 +17893,7 @@
         </p:nvSpPr>
         <p:spPr>
           <a:xfrm>
-            <a:off x="5931414" y="6077725"/>
+            <a:off x="5931414" y="5661581"/>
             <a:ext cx="6138671" cy="993641"/>
           </a:xfrm>
           <a:prstGeom prst="rect">
@@ -17959,7 +17959,7 @@
         </p:nvSpPr>
         <p:spPr>
           <a:xfrm>
-            <a:off x="6053342" y="6155364"/>
+            <a:off x="6053342" y="5739220"/>
             <a:ext cx="5880208" cy="360993"/>
           </a:xfrm>
           <a:prstGeom prst="rect">
@@ -18032,7 +18032,7 @@
         </p:nvSpPr>
         <p:spPr>
           <a:xfrm>
-            <a:off x="6053342" y="6626365"/>
+            <a:off x="6053342" y="6210221"/>
             <a:ext cx="5880208" cy="411162"/>
           </a:xfrm>
           <a:prstGeom prst="rect">
@@ -18873,7 +18873,7 @@
         </p:nvSpPr>
         <p:spPr>
           <a:xfrm>
-            <a:off x="210312" y="2182366"/>
+            <a:off x="210312" y="2048250"/>
             <a:ext cx="11356848" cy="1121668"/>
           </a:xfrm>
           <a:prstGeom prst="rect">
@@ -18939,7 +18939,7 @@
         </p:nvSpPr>
         <p:spPr>
           <a:xfrm>
-            <a:off x="210312" y="2182366"/>
+            <a:off x="210312" y="2048250"/>
             <a:ext cx="96657" cy="1121668"/>
           </a:xfrm>
           <a:prstGeom prst="rect">
@@ -19002,7 +19002,7 @@
         </p:nvSpPr>
         <p:spPr>
           <a:xfrm>
-            <a:off x="454155" y="2255517"/>
+            <a:off x="454155" y="2121401"/>
             <a:ext cx="5074338" cy="425052"/>
           </a:xfrm>
           <a:prstGeom prst="rect">
@@ -19075,7 +19075,7 @@
         </p:nvSpPr>
         <p:spPr>
           <a:xfrm>
-            <a:off x="454155" y="2767581"/>
+            <a:off x="454155" y="2633465"/>
             <a:ext cx="4832699" cy="448669"/>
           </a:xfrm>
           <a:prstGeom prst="rect">
@@ -19148,7 +19148,7 @@
         </p:nvSpPr>
         <p:spPr>
           <a:xfrm>
-            <a:off x="5635748" y="2304292"/>
+            <a:off x="5635748" y="2170176"/>
             <a:ext cx="48323" cy="885525"/>
           </a:xfrm>
           <a:prstGeom prst="rect">
@@ -19211,7 +19211,7 @@
         </p:nvSpPr>
         <p:spPr>
           <a:xfrm>
-            <a:off x="5818629" y="2255517"/>
+            <a:off x="5818629" y="2121401"/>
             <a:ext cx="1328996" cy="425052"/>
           </a:xfrm>
           <a:prstGeom prst="rect">
@@ -19284,7 +19284,7 @@
         </p:nvSpPr>
         <p:spPr>
           <a:xfrm>
-            <a:off x="5818628" y="2718817"/>
+            <a:off x="5818628" y="2584701"/>
             <a:ext cx="5678429" cy="519511"/>
           </a:xfrm>
           <a:prstGeom prst="rect">
@@ -19357,7 +19357,7 @@
         </p:nvSpPr>
         <p:spPr>
           <a:xfrm>
-            <a:off x="210312" y="3462526"/>
+            <a:off x="210312" y="3208166"/>
             <a:ext cx="11356848" cy="1121668"/>
           </a:xfrm>
           <a:prstGeom prst="rect">
@@ -19423,7 +19423,7 @@
         </p:nvSpPr>
         <p:spPr>
           <a:xfrm>
-            <a:off x="210312" y="3462526"/>
+            <a:off x="210312" y="3208166"/>
             <a:ext cx="96657" cy="1121668"/>
           </a:xfrm>
           <a:prstGeom prst="rect">
@@ -19486,7 +19486,7 @@
         </p:nvSpPr>
         <p:spPr>
           <a:xfrm>
-            <a:off x="454155" y="3535677"/>
+            <a:off x="454155" y="3281317"/>
             <a:ext cx="5074338" cy="425052"/>
           </a:xfrm>
           <a:prstGeom prst="rect">
@@ -19559,7 +19559,7 @@
         </p:nvSpPr>
         <p:spPr>
           <a:xfrm>
-            <a:off x="454155" y="4047741"/>
+            <a:off x="454155" y="3793381"/>
             <a:ext cx="4832699" cy="448669"/>
           </a:xfrm>
           <a:prstGeom prst="rect">
@@ -19632,7 +19632,7 @@
         </p:nvSpPr>
         <p:spPr>
           <a:xfrm>
-            <a:off x="5635748" y="3584452"/>
+            <a:off x="5635748" y="3330092"/>
             <a:ext cx="48323" cy="885525"/>
           </a:xfrm>
           <a:prstGeom prst="rect">
@@ -19695,7 +19695,7 @@
         </p:nvSpPr>
         <p:spPr>
           <a:xfrm>
-            <a:off x="5818629" y="3535677"/>
+            <a:off x="5818629" y="3281317"/>
             <a:ext cx="1328996" cy="425052"/>
           </a:xfrm>
           <a:prstGeom prst="rect">
@@ -19768,7 +19768,7 @@
         </p:nvSpPr>
         <p:spPr>
           <a:xfrm>
-            <a:off x="5818628" y="3998977"/>
+            <a:off x="5818628" y="3744617"/>
             <a:ext cx="5678429" cy="519511"/>
           </a:xfrm>
           <a:prstGeom prst="rect">
@@ -19841,7 +19841,7 @@
         </p:nvSpPr>
         <p:spPr>
           <a:xfrm>
-            <a:off x="210312" y="4742686"/>
+            <a:off x="210312" y="4376920"/>
             <a:ext cx="11356848" cy="1121668"/>
           </a:xfrm>
           <a:prstGeom prst="rect">
@@ -19907,7 +19907,7 @@
         </p:nvSpPr>
         <p:spPr>
           <a:xfrm>
-            <a:off x="210312" y="4742686"/>
+            <a:off x="210312" y="4376920"/>
             <a:ext cx="96657" cy="1121668"/>
           </a:xfrm>
           <a:prstGeom prst="rect">
@@ -19970,7 +19970,7 @@
         </p:nvSpPr>
         <p:spPr>
           <a:xfrm>
-            <a:off x="454155" y="4815837"/>
+            <a:off x="454155" y="4450071"/>
             <a:ext cx="5074338" cy="425052"/>
           </a:xfrm>
           <a:prstGeom prst="rect">
@@ -20043,7 +20043,7 @@
         </p:nvSpPr>
         <p:spPr>
           <a:xfrm>
-            <a:off x="454155" y="5327901"/>
+            <a:off x="454155" y="4962135"/>
             <a:ext cx="4832699" cy="448669"/>
           </a:xfrm>
           <a:prstGeom prst="rect">
@@ -20116,7 +20116,7 @@
         </p:nvSpPr>
         <p:spPr>
           <a:xfrm>
-            <a:off x="5635748" y="4864612"/>
+            <a:off x="5635748" y="4498846"/>
             <a:ext cx="48323" cy="885525"/>
           </a:xfrm>
           <a:prstGeom prst="rect">
@@ -20179,7 +20179,7 @@
         </p:nvSpPr>
         <p:spPr>
           <a:xfrm>
-            <a:off x="5818629" y="4815837"/>
+            <a:off x="5818629" y="4450071"/>
             <a:ext cx="1328996" cy="425052"/>
           </a:xfrm>
           <a:prstGeom prst="rect">
@@ -20252,7 +20252,7 @@
         </p:nvSpPr>
         <p:spPr>
           <a:xfrm>
-            <a:off x="5818628" y="5279137"/>
+            <a:off x="5818628" y="4913371"/>
             <a:ext cx="5678429" cy="519511"/>
           </a:xfrm>
           <a:prstGeom prst="rect">
@@ -20325,7 +20325,7 @@
         </p:nvSpPr>
         <p:spPr>
           <a:xfrm>
-            <a:off x="210312" y="6022846"/>
+            <a:off x="210312" y="5533269"/>
             <a:ext cx="11356848" cy="1121668"/>
           </a:xfrm>
           <a:prstGeom prst="rect">
@@ -20391,7 +20391,7 @@
         </p:nvSpPr>
         <p:spPr>
           <a:xfrm>
-            <a:off x="210312" y="6022846"/>
+            <a:off x="210312" y="5533269"/>
             <a:ext cx="96657" cy="1121668"/>
           </a:xfrm>
           <a:prstGeom prst="rect">
@@ -20454,7 +20454,7 @@
         </p:nvSpPr>
         <p:spPr>
           <a:xfrm>
-            <a:off x="454155" y="6095997"/>
+            <a:off x="454155" y="5606420"/>
             <a:ext cx="5074338" cy="425052"/>
           </a:xfrm>
           <a:prstGeom prst="rect">
@@ -20527,7 +20527,7 @@
         </p:nvSpPr>
         <p:spPr>
           <a:xfrm>
-            <a:off x="454155" y="6608061"/>
+            <a:off x="454155" y="6118484"/>
             <a:ext cx="4832699" cy="448669"/>
           </a:xfrm>
           <a:prstGeom prst="rect">
@@ -20600,7 +20600,7 @@
         </p:nvSpPr>
         <p:spPr>
           <a:xfrm>
-            <a:off x="5635748" y="6144772"/>
+            <a:off x="5635748" y="5655195"/>
             <a:ext cx="48323" cy="885525"/>
           </a:xfrm>
           <a:prstGeom prst="rect">
@@ -20663,7 +20663,7 @@
         </p:nvSpPr>
         <p:spPr>
           <a:xfrm>
-            <a:off x="5818629" y="6095997"/>
+            <a:off x="5818629" y="5606420"/>
             <a:ext cx="1328996" cy="425052"/>
           </a:xfrm>
           <a:prstGeom prst="rect">
@@ -20736,7 +20736,7 @@
         </p:nvSpPr>
         <p:spPr>
           <a:xfrm>
-            <a:off x="5818628" y="6559297"/>
+            <a:off x="5818628" y="6069720"/>
             <a:ext cx="5678429" cy="519511"/>
           </a:xfrm>
           <a:prstGeom prst="rect">

--- a/DOKUMENTUMOK/SzakmaiVizsga_Prezentacio.pptx
+++ b/DOKUMENTUMOK/SzakmaiVizsga_Prezentacio.pptx
@@ -277,7 +277,7 @@
             <a:fld id="{A4875C68-41B4-4262-A6AB-3309F1D83C9B}" type="datetime1">
               <a:rPr lang="hu-HU"/>
               <a:pPr lvl="0"/>
-              <a:t>2026. 04. 13.</a:t>
+              <a:t>2026. 04. 15.</a:t>
             </a:fld>
             <a:endParaRPr lang="hu-HU"/>
           </a:p>
@@ -2175,7 +2175,12 @@
             <p:ph type="sldImg"/>
           </p:nvPr>
         </p:nvSpPr>
-        <p:spPr/>
+        <p:spPr>
+          <a:xfrm>
+            <a:off x="685800" y="1143000"/>
+            <a:ext cx="5486400" cy="3086100"/>
+          </a:xfrm>
+        </p:spPr>
       </p:sp>
       <p:sp>
         <p:nvSpPr>
@@ -3068,7 +3073,7 @@
             <a:fld id="{7636A302-0D39-43B4-B12B-CDD5BAEF6732}" type="datetime1">
               <a:rPr lang="hu-HU"/>
               <a:pPr lvl="0"/>
-              <a:t>2026. 04. 13.</a:t>
+              <a:t>2026. 04. 15.</a:t>
             </a:fld>
             <a:endParaRPr lang="hu-HU"/>
           </a:p>
@@ -3304,7 +3309,7 @@
             <a:fld id="{3B0C5518-E666-40F1-9AF0-D353F8D844CC}" type="datetime1">
               <a:rPr lang="hu-HU"/>
               <a:pPr lvl="0"/>
-              <a:t>2026. 04. 13.</a:t>
+              <a:t>2026. 04. 15.</a:t>
             </a:fld>
             <a:endParaRPr lang="hu-HU"/>
           </a:p>
@@ -3550,7 +3555,7 @@
             <a:fld id="{6EB9FB72-B17C-4EE6-899C-36BDD2FAFA48}" type="datetime1">
               <a:rPr lang="hu-HU"/>
               <a:pPr lvl="0"/>
-              <a:t>2026. 04. 13.</a:t>
+              <a:t>2026. 04. 15.</a:t>
             </a:fld>
             <a:endParaRPr lang="hu-HU"/>
           </a:p>
@@ -3825,7 +3830,7 @@
             <a:fld id="{67FBAACA-08A4-4EBE-9E0C-58B65AE4A5A7}" type="datetime1">
               <a:rPr lang="hu-HU"/>
               <a:pPr lvl="0"/>
-              <a:t>2026. 04. 13.</a:t>
+              <a:t>2026. 04. 15.</a:t>
             </a:fld>
             <a:endParaRPr lang="hu-HU"/>
           </a:p>
@@ -4035,7 +4040,7 @@
             <a:fld id="{4A835D54-A19F-42F4-947F-ABC3E6BC268E}" type="datetime1">
               <a:rPr lang="hu-HU"/>
               <a:pPr lvl="0"/>
-              <a:t>2026. 04. 13.</a:t>
+              <a:t>2026. 04. 15.</a:t>
             </a:fld>
             <a:endParaRPr lang="hu-HU"/>
           </a:p>
@@ -4355,7 +4360,7 @@
             <a:fld id="{11375920-0594-4B7A-9F54-4CA5B22C6B54}" type="datetime1">
               <a:rPr lang="hu-HU"/>
               <a:pPr lvl="0"/>
-              <a:t>2026. 04. 13.</a:t>
+              <a:t>2026. 04. 15.</a:t>
             </a:fld>
             <a:endParaRPr lang="hu-HU"/>
           </a:p>
@@ -4758,7 +4763,7 @@
             <a:fld id="{7E53AA98-F41F-462E-8F83-5380F28C0AEC}" type="datetime1">
               <a:rPr lang="hu-HU"/>
               <a:pPr lvl="0"/>
-              <a:t>2026. 04. 13.</a:t>
+              <a:t>2026. 04. 15.</a:t>
             </a:fld>
             <a:endParaRPr lang="hu-HU"/>
           </a:p>
@@ -4920,7 +4925,7 @@
             <a:fld id="{B1BF45F6-A8D9-43F4-9CDF-9E349FB991E6}" type="datetime1">
               <a:rPr lang="hu-HU"/>
               <a:pPr lvl="0"/>
-              <a:t>2026. 04. 13.</a:t>
+              <a:t>2026. 04. 15.</a:t>
             </a:fld>
             <a:endParaRPr lang="hu-HU"/>
           </a:p>
@@ -5048,7 +5053,7 @@
             <a:fld id="{DA8389BB-691F-4C0B-AE2B-929C3C08EACD}" type="datetime1">
               <a:rPr lang="hu-HU"/>
               <a:pPr lvl="0"/>
-              <a:t>2026. 04. 13.</a:t>
+              <a:t>2026. 04. 15.</a:t>
             </a:fld>
             <a:endParaRPr lang="hu-HU"/>
           </a:p>
@@ -5333,7 +5338,7 @@
             <a:fld id="{2BF7091A-BA1D-4307-B1AD-530736BB8FB7}" type="datetime1">
               <a:rPr lang="hu-HU"/>
               <a:pPr lvl="0"/>
-              <a:t>2026. 04. 13.</a:t>
+              <a:t>2026. 04. 15.</a:t>
             </a:fld>
             <a:endParaRPr lang="hu-HU"/>
           </a:p>
@@ -5575,7 +5580,7 @@
             <a:fld id="{C3FB93FE-C09A-48F6-A94B-D2D05F1D57E7}" type="datetime1">
               <a:rPr lang="hu-HU"/>
               <a:pPr lvl="0"/>
-              <a:t>2026. 04. 13.</a:t>
+              <a:t>2026. 04. 15.</a:t>
             </a:fld>
             <a:endParaRPr lang="hu-HU"/>
           </a:p>
@@ -5858,7 +5863,7 @@
             <a:fld id="{63794B5B-B97E-4CAC-8EC2-FA54EA6FC3B4}" type="datetime1">
               <a:rPr lang="hu-HU"/>
               <a:pPr lvl="0"/>
-              <a:t>2026. 04. 13.</a:t>
+              <a:t>2026. 04. 15.</a:t>
             </a:fld>
             <a:endParaRPr lang="hu-HU"/>
           </a:p>
@@ -31185,7 +31190,7 @@
               </a:defRPr>
             </a:pPr>
             <a:r>
-              <a:rPr lang="en-US" sz="1467" b="0" i="0" u="none" strike="noStrike" kern="1200" cap="none" spc="0" baseline="0">
+              <a:rPr lang="en-US" sz="1467" b="0" i="0" u="none" strike="noStrike" kern="1200" cap="none" spc="0" baseline="0" dirty="0">
                 <a:solidFill>
                   <a:srgbClr val="1E293B"/>
                 </a:solidFill>
@@ -31196,7 +31201,7 @@
               </a:rPr>
               <a:t>• Tailwind CSS</a:t>
             </a:r>
-            <a:endParaRPr lang="en-US" sz="1467" b="0" i="0" u="none" strike="noStrike" kern="1200" cap="none" spc="0" baseline="0">
+            <a:endParaRPr lang="en-US" sz="1467" b="0" i="0" u="none" strike="noStrike" kern="1200" cap="none" spc="0" baseline="0" dirty="0">
               <a:solidFill>
                 <a:srgbClr val="000000"/>
               </a:solidFill>
@@ -31258,7 +31263,7 @@
               </a:defRPr>
             </a:pPr>
             <a:r>
-              <a:rPr lang="en-US" sz="1467" b="0" i="0" u="none" strike="noStrike" kern="1200" cap="none" spc="0" baseline="0">
+              <a:rPr lang="en-US" sz="1467" b="0" i="0" u="none" strike="noStrike" kern="1200" cap="none" spc="0" baseline="0" dirty="0">
                 <a:solidFill>
                   <a:srgbClr val="1E293B"/>
                 </a:solidFill>
@@ -31269,7 +31274,7 @@
               </a:rPr>
               <a:t>• JavaScript (ES6+)</a:t>
             </a:r>
-            <a:endParaRPr lang="en-US" sz="1467" b="0" i="0" u="none" strike="noStrike" kern="1200" cap="none" spc="0" baseline="0">
+            <a:endParaRPr lang="en-US" sz="1467" b="0" i="0" u="none" strike="noStrike" kern="1200" cap="none" spc="0" baseline="0" dirty="0">
               <a:solidFill>
                 <a:srgbClr val="000000"/>
               </a:solidFill>
@@ -31331,7 +31336,7 @@
               </a:defRPr>
             </a:pPr>
             <a:r>
-              <a:rPr lang="en-US" sz="1467" b="0" i="0" u="none" strike="noStrike" kern="1200" cap="none" spc="0" baseline="0">
+              <a:rPr lang="en-US" sz="1467" b="0" i="0" u="none" strike="noStrike" kern="1200" cap="none" spc="0" baseline="0" dirty="0">
                 <a:solidFill>
                   <a:srgbClr val="1E293B"/>
                 </a:solidFill>
@@ -31342,7 +31347,7 @@
               </a:rPr>
               <a:t>• jQuery</a:t>
             </a:r>
-            <a:endParaRPr lang="en-US" sz="1467" b="0" i="0" u="none" strike="noStrike" kern="1200" cap="none" spc="0" baseline="0">
+            <a:endParaRPr lang="en-US" sz="1467" b="0" i="0" u="none" strike="noStrike" kern="1200" cap="none" spc="0" baseline="0" dirty="0">
               <a:solidFill>
                 <a:srgbClr val="000000"/>
               </a:solidFill>
@@ -31404,7 +31409,7 @@
               </a:defRPr>
             </a:pPr>
             <a:r>
-              <a:rPr lang="en-US" sz="1467" b="0" i="0" u="none" strike="noStrike" kern="1200" cap="none" spc="0" baseline="0">
+              <a:rPr lang="en-US" sz="1467" b="0" i="0" u="none" strike="noStrike" kern="1200" cap="none" spc="0" baseline="0" dirty="0">
                 <a:solidFill>
                   <a:srgbClr val="1E293B"/>
                 </a:solidFill>
@@ -31415,7 +31420,7 @@
               </a:rPr>
               <a:t>• Font Awesome</a:t>
             </a:r>
-            <a:endParaRPr lang="en-US" sz="1467" b="0" i="0" u="none" strike="noStrike" kern="1200" cap="none" spc="0" baseline="0">
+            <a:endParaRPr lang="en-US" sz="1467" b="0" i="0" u="none" strike="noStrike" kern="1200" cap="none" spc="0" baseline="0" dirty="0">
               <a:solidFill>
                 <a:srgbClr val="000000"/>
               </a:solidFill>
@@ -33408,6 +33413,126 @@
           </a:p>
         </p:txBody>
       </p:sp>
+      <p:pic>
+        <p:nvPicPr>
+          <p:cNvPr id="47" name="Kép 46">
+            <a:extLst>
+              <a:ext uri="{FF2B5EF4-FFF2-40B4-BE49-F238E27FC236}">
+                <a16:creationId xmlns:a16="http://schemas.microsoft.com/office/drawing/2014/main" id="{B62C2022-68FA-A350-7465-2732266F3B1B}"/>
+              </a:ext>
+            </a:extLst>
+          </p:cNvPr>
+          <p:cNvPicPr>
+            <a:picLocks noChangeAspect="1"/>
+          </p:cNvPicPr>
+          <p:nvPr/>
+        </p:nvPicPr>
+        <p:blipFill>
+          <a:blip r:embed="rId3"/>
+          <a:stretch>
+            <a:fillRect/>
+          </a:stretch>
+        </p:blipFill>
+        <p:spPr>
+          <a:xfrm>
+            <a:off x="1794078" y="1661895"/>
+            <a:ext cx="957866" cy="740169"/>
+          </a:xfrm>
+          <a:prstGeom prst="rect">
+            <a:avLst/>
+          </a:prstGeom>
+        </p:spPr>
+      </p:pic>
+      <p:pic>
+        <p:nvPicPr>
+          <p:cNvPr id="49" name="Kép 48">
+            <a:extLst>
+              <a:ext uri="{FF2B5EF4-FFF2-40B4-BE49-F238E27FC236}">
+                <a16:creationId xmlns:a16="http://schemas.microsoft.com/office/drawing/2014/main" id="{22DA1207-B9DD-0F4E-8244-555E3255EC17}"/>
+              </a:ext>
+            </a:extLst>
+          </p:cNvPr>
+          <p:cNvPicPr>
+            <a:picLocks noChangeAspect="1"/>
+          </p:cNvPicPr>
+          <p:nvPr/>
+        </p:nvPicPr>
+        <p:blipFill>
+          <a:blip r:embed="rId4"/>
+          <a:stretch>
+            <a:fillRect/>
+          </a:stretch>
+        </p:blipFill>
+        <p:spPr>
+          <a:xfrm>
+            <a:off x="2796709" y="1719500"/>
+            <a:ext cx="763915" cy="608745"/>
+          </a:xfrm>
+          <a:prstGeom prst="rect">
+            <a:avLst/>
+          </a:prstGeom>
+        </p:spPr>
+      </p:pic>
+      <p:pic>
+        <p:nvPicPr>
+          <p:cNvPr id="51" name="Kép 50">
+            <a:extLst>
+              <a:ext uri="{FF2B5EF4-FFF2-40B4-BE49-F238E27FC236}">
+                <a16:creationId xmlns:a16="http://schemas.microsoft.com/office/drawing/2014/main" id="{C2DBEA4C-BE3F-BB39-5B2A-5F167E5830E2}"/>
+              </a:ext>
+            </a:extLst>
+          </p:cNvPr>
+          <p:cNvPicPr>
+            <a:picLocks noChangeAspect="1"/>
+          </p:cNvPicPr>
+          <p:nvPr/>
+        </p:nvPicPr>
+        <p:blipFill>
+          <a:blip r:embed="rId5"/>
+          <a:stretch>
+            <a:fillRect/>
+          </a:stretch>
+        </p:blipFill>
+        <p:spPr>
+          <a:xfrm>
+            <a:off x="9845417" y="45197"/>
+            <a:ext cx="2163699" cy="1323890"/>
+          </a:xfrm>
+          <a:prstGeom prst="rect">
+            <a:avLst/>
+          </a:prstGeom>
+        </p:spPr>
+      </p:pic>
+      <p:pic>
+        <p:nvPicPr>
+          <p:cNvPr id="53" name="Kép 52">
+            <a:extLst>
+              <a:ext uri="{FF2B5EF4-FFF2-40B4-BE49-F238E27FC236}">
+                <a16:creationId xmlns:a16="http://schemas.microsoft.com/office/drawing/2014/main" id="{9AE43288-08F9-0B5D-711D-0D1583A744BC}"/>
+              </a:ext>
+            </a:extLst>
+          </p:cNvPr>
+          <p:cNvPicPr>
+            <a:picLocks noChangeAspect="1"/>
+          </p:cNvPicPr>
+          <p:nvPr/>
+        </p:nvPicPr>
+        <p:blipFill>
+          <a:blip r:embed="rId6"/>
+          <a:stretch>
+            <a:fillRect/>
+          </a:stretch>
+        </p:blipFill>
+        <p:spPr>
+          <a:xfrm>
+            <a:off x="7632191" y="4552933"/>
+            <a:ext cx="2014729" cy="528866"/>
+          </a:xfrm>
+          <a:prstGeom prst="rect">
+            <a:avLst/>
+          </a:prstGeom>
+        </p:spPr>
+      </p:pic>
     </p:spTree>
   </p:cSld>
   <p:clrMapOvr>
